--- a/flask-05-Handling-SQL-with-Flask-Web-Application/Presentation1.pptx
+++ b/flask-05-Handling-SQL-with-Flask-Web-Application/Presentation1.pptx
@@ -104,13 +104,18 @@
       </a:defRPr>
     </a:lvl9pPr>
   </p:defaultTextStyle>
+  <p:extLst>
+    <p:ext uri="{EFAFB233-063F-42B5-8137-9DF3F51BA10A}">
+      <p15:sldGuideLst xmlns:p15="http://schemas.microsoft.com/office/powerpoint/2012/main"/>
+    </p:ext>
+  </p:extLst>
 </p:presentation>
 </file>
 
 <file path=ppt/revisionInfo.xml><?xml version="1.0" encoding="utf-8"?>
 <p1510:revInfo xmlns:a="http://schemas.openxmlformats.org/drawingml/2006/main" xmlns:r="http://schemas.openxmlformats.org/officeDocument/2006/relationships" xmlns:p1510="http://schemas.microsoft.com/office/powerpoint/2015/10/main">
   <p1510:revLst>
-    <p1510:client id="{1D986B2B-E464-4337-B2C2-E0E7BE4D8DE6}" v="6" dt="2025-03-18T01:08:46.315"/>
+    <p1510:client id="{1D986B2B-E464-4337-B2C2-E0E7BE4D8DE6}" v="7" dt="2025-03-18T01:13:29.198"/>
   </p1510:revLst>
 </p1510:revInfo>
 </file>
@@ -120,18 +125,42 @@
   <pc:docChgLst>
     <pc:chgData name="Altaz Bhanji" userId="994edb2cde3f21c0" providerId="LiveId" clId="{1D986B2B-E464-4337-B2C2-E0E7BE4D8DE6}"/>
     <pc:docChg chg="modSld">
-      <pc:chgData name="Altaz Bhanji" userId="994edb2cde3f21c0" providerId="LiveId" clId="{1D986B2B-E464-4337-B2C2-E0E7BE4D8DE6}" dt="2025-03-18T01:09:13.298" v="35" actId="1076"/>
+      <pc:chgData name="Altaz Bhanji" userId="994edb2cde3f21c0" providerId="LiveId" clId="{1D986B2B-E464-4337-B2C2-E0E7BE4D8DE6}" dt="2025-03-18T01:46:58.557" v="52" actId="1076"/>
       <pc:docMkLst>
         <pc:docMk/>
       </pc:docMkLst>
       <pc:sldChg chg="addSp modSp mod">
-        <pc:chgData name="Altaz Bhanji" userId="994edb2cde3f21c0" providerId="LiveId" clId="{1D986B2B-E464-4337-B2C2-E0E7BE4D8DE6}" dt="2025-03-18T01:09:13.298" v="35" actId="1076"/>
+        <pc:chgData name="Altaz Bhanji" userId="994edb2cde3f21c0" providerId="LiveId" clId="{1D986B2B-E464-4337-B2C2-E0E7BE4D8DE6}" dt="2025-03-18T01:46:58.557" v="52" actId="1076"/>
         <pc:sldMkLst>
           <pc:docMk/>
           <pc:sldMk cId="3757676387" sldId="256"/>
         </pc:sldMkLst>
         <pc:spChg chg="add mod">
-          <ac:chgData name="Altaz Bhanji" userId="994edb2cde3f21c0" providerId="LiveId" clId="{1D986B2B-E464-4337-B2C2-E0E7BE4D8DE6}" dt="2025-03-18T01:09:03.987" v="34" actId="1076"/>
+          <ac:chgData name="Altaz Bhanji" userId="994edb2cde3f21c0" providerId="LiveId" clId="{1D986B2B-E464-4337-B2C2-E0E7BE4D8DE6}" dt="2025-03-18T01:13:26.468" v="43" actId="20577"/>
+          <ac:spMkLst>
+            <pc:docMk/>
+            <pc:sldMk cId="3757676387" sldId="256"/>
+            <ac:spMk id="2" creationId="{415C4AA7-F917-05EB-45FB-6A56679924A1}"/>
+          </ac:spMkLst>
+        </pc:spChg>
+        <pc:spChg chg="mod">
+          <ac:chgData name="Altaz Bhanji" userId="994edb2cde3f21c0" providerId="LiveId" clId="{1D986B2B-E464-4337-B2C2-E0E7BE4D8DE6}" dt="2025-03-18T01:46:58.557" v="52" actId="1076"/>
+          <ac:spMkLst>
+            <pc:docMk/>
+            <pc:sldMk cId="3757676387" sldId="256"/>
+            <ac:spMk id="8" creationId="{8D01427B-5F30-D9A3-55C8-BBAADDD2F485}"/>
+          </ac:spMkLst>
+        </pc:spChg>
+        <pc:spChg chg="add mod">
+          <ac:chgData name="Altaz Bhanji" userId="994edb2cde3f21c0" providerId="LiveId" clId="{1D986B2B-E464-4337-B2C2-E0E7BE4D8DE6}" dt="2025-03-18T01:15:22.890" v="51" actId="14100"/>
+          <ac:spMkLst>
+            <pc:docMk/>
+            <pc:sldMk cId="3757676387" sldId="256"/>
+            <ac:spMk id="12" creationId="{47F27327-D5CE-048D-CA3C-737A10A1C4C6}"/>
+          </ac:spMkLst>
+        </pc:spChg>
+        <pc:spChg chg="add mod">
+          <ac:chgData name="Altaz Bhanji" userId="994edb2cde3f21c0" providerId="LiveId" clId="{1D986B2B-E464-4337-B2C2-E0E7BE4D8DE6}" dt="2025-03-18T01:13:43.716" v="47" actId="1076"/>
           <ac:spMkLst>
             <pc:docMk/>
             <pc:sldMk cId="3757676387" sldId="256"/>
@@ -154,6 +183,22 @@
             <ac:spMk id="34" creationId="{C7EFCE0C-925F-8C1E-851B-08F549E9D4E7}"/>
           </ac:spMkLst>
         </pc:spChg>
+        <pc:cxnChg chg="add mod">
+          <ac:chgData name="Altaz Bhanji" userId="994edb2cde3f21c0" providerId="LiveId" clId="{1D986B2B-E464-4337-B2C2-E0E7BE4D8DE6}" dt="2025-03-18T01:13:34.838" v="46" actId="14100"/>
+          <ac:cxnSpMkLst>
+            <pc:docMk/>
+            <pc:sldMk cId="3757676387" sldId="256"/>
+            <ac:cxnSpMk id="3" creationId="{89F4B6A8-88E0-00A5-0685-47FE41105742}"/>
+          </ac:cxnSpMkLst>
+        </pc:cxnChg>
+        <pc:cxnChg chg="mod">
+          <ac:chgData name="Altaz Bhanji" userId="994edb2cde3f21c0" providerId="LiveId" clId="{1D986B2B-E464-4337-B2C2-E0E7BE4D8DE6}" dt="2025-03-18T01:46:58.557" v="52" actId="1076"/>
+          <ac:cxnSpMkLst>
+            <pc:docMk/>
+            <pc:sldMk cId="3757676387" sldId="256"/>
+            <ac:cxnSpMk id="10" creationId="{D3672C04-92A9-DC49-2653-247D39780ABA}"/>
+          </ac:cxnSpMkLst>
+        </pc:cxnChg>
         <pc:cxnChg chg="mod">
           <ac:chgData name="Altaz Bhanji" userId="994edb2cde3f21c0" providerId="LiveId" clId="{1D986B2B-E464-4337-B2C2-E0E7BE4D8DE6}" dt="2025-03-18T01:09:13.298" v="35" actId="1076"/>
           <ac:cxnSpMkLst>
@@ -3650,7 +3695,7 @@
         </p:nvSpPr>
         <p:spPr>
           <a:xfrm>
-            <a:off x="8346279" y="4879181"/>
+            <a:off x="8346277" y="5397396"/>
             <a:ext cx="935831" cy="1193006"/>
           </a:xfrm>
           <a:prstGeom prst="can">
@@ -3765,9 +3810,9 @@
           <p:nvPr/>
         </p:nvCxnSpPr>
         <p:spPr>
-          <a:xfrm>
-            <a:off x="8814194" y="4136233"/>
-            <a:ext cx="1" cy="742948"/>
+          <a:xfrm flipH="1">
+            <a:off x="8814193" y="4136233"/>
+            <a:ext cx="1" cy="1261163"/>
           </a:xfrm>
           <a:prstGeom prst="straightConnector1">
             <a:avLst/>
@@ -4142,7 +4187,7 @@
         </p:nvSpPr>
         <p:spPr>
           <a:xfrm>
-            <a:off x="9850041" y="2667704"/>
+            <a:off x="7396377" y="2667704"/>
             <a:ext cx="516733" cy="411254"/>
           </a:xfrm>
           <a:prstGeom prst="rect">
@@ -4282,6 +4327,150 @@
           </a:fontRef>
         </p:style>
       </p:cxnSp>
+      <p:sp>
+        <p:nvSpPr>
+          <p:cNvPr id="2" name="Rectangle 1">
+            <a:extLst>
+              <a:ext uri="{FF2B5EF4-FFF2-40B4-BE49-F238E27FC236}">
+                <a16:creationId xmlns:a16="http://schemas.microsoft.com/office/drawing/2014/main" id="{415C4AA7-F917-05EB-45FB-6A56679924A1}"/>
+              </a:ext>
+            </a:extLst>
+          </p:cNvPr>
+          <p:cNvSpPr/>
+          <p:nvPr/>
+        </p:nvSpPr>
+        <p:spPr>
+          <a:xfrm>
+            <a:off x="10801815" y="939691"/>
+            <a:ext cx="1147297" cy="954473"/>
+          </a:xfrm>
+          <a:prstGeom prst="rect">
+            <a:avLst/>
+          </a:prstGeom>
+        </p:spPr>
+        <p:style>
+          <a:lnRef idx="2">
+            <a:schemeClr val="dk1">
+              <a:shade val="15000"/>
+            </a:schemeClr>
+          </a:lnRef>
+          <a:fillRef idx="1">
+            <a:schemeClr val="dk1"/>
+          </a:fillRef>
+          <a:effectRef idx="0">
+            <a:schemeClr val="dk1"/>
+          </a:effectRef>
+          <a:fontRef idx="minor">
+            <a:schemeClr val="lt1"/>
+          </a:fontRef>
+        </p:style>
+        <p:txBody>
+          <a:bodyPr rtlCol="0" anchor="ctr"/>
+          <a:lstStyle/>
+          <a:p>
+            <a:pPr algn="ctr"/>
+            <a:r>
+              <a:rPr lang="en-US" dirty="0"/>
+              <a:t>GitHub</a:t>
+            </a:r>
+          </a:p>
+        </p:txBody>
+      </p:sp>
+      <p:cxnSp>
+        <p:nvCxnSpPr>
+          <p:cNvPr id="3" name="Straight Arrow Connector 2">
+            <a:extLst>
+              <a:ext uri="{FF2B5EF4-FFF2-40B4-BE49-F238E27FC236}">
+                <a16:creationId xmlns:a16="http://schemas.microsoft.com/office/drawing/2014/main" id="{89F4B6A8-88E0-00A5-0685-47FE41105742}"/>
+              </a:ext>
+            </a:extLst>
+          </p:cNvPr>
+          <p:cNvCxnSpPr>
+            <a:cxnSpLocks/>
+            <a:stCxn id="2" idx="2"/>
+            <a:endCxn id="9" idx="3"/>
+          </p:cNvCxnSpPr>
+          <p:nvPr/>
+        </p:nvCxnSpPr>
+        <p:spPr>
+          <a:xfrm flipH="1">
+            <a:off x="9621437" y="1894164"/>
+            <a:ext cx="1754027" cy="1713432"/>
+          </a:xfrm>
+          <a:prstGeom prst="straightConnector1">
+            <a:avLst/>
+          </a:prstGeom>
+          <a:ln>
+            <a:tailEnd type="triangle"/>
+          </a:ln>
+        </p:spPr>
+        <p:style>
+          <a:lnRef idx="2">
+            <a:schemeClr val="accent1"/>
+          </a:lnRef>
+          <a:fillRef idx="0">
+            <a:schemeClr val="accent1"/>
+          </a:fillRef>
+          <a:effectRef idx="1">
+            <a:schemeClr val="accent1"/>
+          </a:effectRef>
+          <a:fontRef idx="minor">
+            <a:schemeClr val="tx1"/>
+          </a:fontRef>
+        </p:style>
+      </p:cxnSp>
+      <p:sp>
+        <p:nvSpPr>
+          <p:cNvPr id="12" name="Rectangle 11">
+            <a:extLst>
+              <a:ext uri="{FF2B5EF4-FFF2-40B4-BE49-F238E27FC236}">
+                <a16:creationId xmlns:a16="http://schemas.microsoft.com/office/drawing/2014/main" id="{47F27327-D5CE-048D-CA3C-737A10A1C4C6}"/>
+              </a:ext>
+            </a:extLst>
+          </p:cNvPr>
+          <p:cNvSpPr/>
+          <p:nvPr/>
+        </p:nvSpPr>
+        <p:spPr>
+          <a:xfrm>
+            <a:off x="6839415" y="2103863"/>
+            <a:ext cx="3769112" cy="2594515"/>
+          </a:xfrm>
+          <a:prstGeom prst="rect">
+            <a:avLst/>
+          </a:prstGeom>
+          <a:noFill/>
+          <a:ln>
+            <a:solidFill>
+              <a:schemeClr val="tx1"/>
+            </a:solidFill>
+          </a:ln>
+        </p:spPr>
+        <p:style>
+          <a:lnRef idx="2">
+            <a:schemeClr val="accent1">
+              <a:shade val="15000"/>
+            </a:schemeClr>
+          </a:lnRef>
+          <a:fillRef idx="1">
+            <a:schemeClr val="accent1"/>
+          </a:fillRef>
+          <a:effectRef idx="0">
+            <a:schemeClr val="accent1"/>
+          </a:effectRef>
+          <a:fontRef idx="minor">
+            <a:schemeClr val="lt1"/>
+          </a:fontRef>
+        </p:style>
+        <p:txBody>
+          <a:bodyPr rtlCol="0" anchor="ctr"/>
+          <a:lstStyle/>
+          <a:p>
+            <a:pPr algn="ctr"/>
+            <a:endParaRPr lang="en-US"/>
+          </a:p>
+        </p:txBody>
+      </p:sp>
     </p:spTree>
     <p:extLst>
       <p:ext uri="{BB962C8B-B14F-4D97-AF65-F5344CB8AC3E}">
